--- a/workshop/Workshop_Slides_Updated.pptx
+++ b/workshop/Workshop_Slides_Updated.pptx
@@ -986,12 +986,12 @@
           </a:p>
           <a:p>
             <a:r>
-              <a:t>새 스키마에서 같은 만료·부가 데이터·금액·계정으로 비교하고 EAS에 저장된 값을 다시 읽었습니다. false를 폐기한 뒤 true를 발급하여 동시에 유효하지 않게 했습니다. 두 지급 모두 성공했습니다. 이 설정에서 false 발급만으로 지급을 막는 설계는 작동하지 않습니다. 다른 정책·resolver까지 일반화하거나 제품 버그라고 단정하지 않습니다. 신뢰할 발급자 제한은 별도 미검증입니다. 선택 실험 lab:boolean은 웹사이트에서 실행할 수 있습니다.</a:t>
-            </a:r>
-          </a:p>
-          <a:p>
-            <a:r>
-              <a:t>출처: https://github.com/nubro999/maroo-devrel-workshop/blob/main/evidence/live-testnet/EAS_BOOLEAN_VERIFIED.json</a:t>
+              <a:t>기본 시나리오에서 미승인은 해당 자격 증명이 없는 상태, 승인은 유효한 증명을 발급하고 인덱싱한 상태, 승인 취소는 기존 증명을 폐기한 상태입니다. 34–40분에는 폐기된 자격으로 같은 요청을 보냈을 때 EasAttestationRevoked와 status 0을 확인하고, 수취인 잔액과 지급 횟수가 유지되는지 비교합니다. 지급은 차단돼도 실패 거래 수수료는 발생합니다. 마지막으로 정책 복원과 증명 폐기를 확인합니다. 실제 은행의 승인 체계로 사용하려면 신뢰할 발급자 제한이 필요하며 이번 실습에서는 검증하지 않았습니다. bool 값 비교는 기본 발표에서 다루지 않고 정책 해석 주의사항 문서에 남깁니다.</a:t>
+            </a:r>
+          </a:p>
+          <a:p>
+            <a:r>
+              <a:t>출처: https://github.com/nubro999/maroo-devrel-workshop/blob/main/evidence/live-testnet/EAS_LIFECYCLE_VERIFIED.json</a:t>
             </a:r>
           </a:p>
         </p:txBody>
@@ -11405,7 +11405,7 @@
               </a:defRPr>
             </a:pPr>
             <a:r>
-              <a:t>OBSERVED RESULT</a:t>
+              <a:t>APPROVAL LIFECYCLE</a:t>
             </a:r>
           </a:p>
         </p:txBody>
@@ -11520,7 +11520,7 @@
               </a:defRPr>
             </a:pPr>
             <a:r>
-              <a:t>false 증명도 지급이 통과했습니다</a:t>
+              <a:t>승인을 취소하면 다음 지급이 차단됩니다</a:t>
             </a:r>
           </a:p>
         </p:txBody>
@@ -11556,7 +11556,7 @@
               </a:defRPr>
             </a:pPr>
             <a:r>
-              <a:t>이번 EAS_POLICY는 내부 bool 값이 true인지 강제하지 않았습니다</a:t>
+              <a:t>승인 = 유효한 자격 증명 · 승인 취소 = 기존 증명 폐기</a:t>
             </a:r>
           </a:p>
         </p:txBody>
@@ -11637,7 +11637,7 @@
               </a:defRPr>
             </a:pPr>
             <a:r>
-              <a:t>false</a:t>
+              <a:t>폐기</a:t>
             </a:r>
           </a:p>
         </p:txBody>
@@ -11673,7 +11673,7 @@
               </a:defRPr>
             </a:pPr>
             <a:r>
-              <a:t>실제 지급 성공</a:t>
+              <a:t>발급자가 기존 증명 폐기</a:t>
             </a:r>
           </a:p>
           <a:p>
@@ -11686,7 +11686,7 @@
               </a:defRPr>
             </a:pPr>
             <a:r>
-              <a:t>수취 +0.001 tOKRW</a:t>
+              <a:t>revocationTime 확인</a:t>
             </a:r>
           </a:p>
         </p:txBody>
@@ -11767,7 +11767,7 @@
               </a:defRPr>
             </a:pPr>
             <a:r>
-              <a:t>true</a:t>
+              <a:t>차단</a:t>
             </a:r>
           </a:p>
         </p:txBody>
@@ -11803,7 +11803,7 @@
               </a:defRPr>
             </a:pPr>
             <a:r>
-              <a:t>실제 지급 성공</a:t>
+              <a:t>같은 지급 요청 거절</a:t>
             </a:r>
           </a:p>
           <a:p>
@@ -11816,7 +11816,7 @@
               </a:defRPr>
             </a:pPr>
             <a:r>
-              <a:t>수취 +0.001 tOKRW</a:t>
+              <a:t>status 0</a:t>
             </a:r>
           </a:p>
         </p:txBody>
@@ -11897,7 +11897,7 @@
               </a:defRPr>
             </a:pPr>
             <a:r>
-              <a:t>승인 · 폐기</a:t>
+              <a:t>확인</a:t>
             </a:r>
           </a:p>
         </p:txBody>
@@ -11933,7 +11933,7 @@
               </a:defRPr>
             </a:pPr>
             <a:r>
-              <a:t>승인 대상에게만 발급</a:t>
+              <a:t>수취인 잔액 증가 0</a:t>
             </a:r>
           </a:p>
           <a:p>
@@ -11946,7 +11946,7 @@
               </a:defRPr>
             </a:pPr>
             <a:r>
-              <a:t>취소 시 기존 자격 폐기</a:t>
+              <a:t>지급 횟수 유지</a:t>
             </a:r>
           </a:p>
         </p:txBody>
@@ -11974,15 +11974,15 @@
           <a:lstStyle/>
           <a:p>
             <a:pPr>
-              <a:defRPr sz="2200" b="1">
-                <a:solidFill>
-                  <a:srgbClr val="AC4A18"/>
-                </a:solidFill>
-                <a:latin typeface="맑은 고딕"/>
-              </a:defRPr>
-            </a:pPr>
-            <a:r>
-              <a:t>유효한 증명 보유 ≠ 데이터 값의 참·거짓</a:t>
+              <a:defRPr sz="2100" b="1">
+                <a:solidFill>
+                  <a:srgbClr val="007A8A"/>
+                </a:solidFill>
+                <a:latin typeface="맑은 고딕"/>
+              </a:defRPr>
+            </a:pPr>
+            <a:r>
+              <a:t>미승인 차단 → 승인 후 지급 → 승인 취소 후 차단</a:t>
             </a:r>
           </a:p>
         </p:txBody>
